--- a/assets/slides/data-oriented-architectures.pptx
+++ b/assets/slides/data-oriented-architectures.pptx
@@ -242,7 +242,7 @@
           <a:p>
             <a:fld id="{D6F60BA2-1DFE-4286-AB71-68BFEBE24C91}" type="datetimeFigureOut">
               <a:rPr lang="en-GB" smtClean="0"/>
-              <a:t>07/11/2024</a:t>
+              <a:t>27/05/2025</a:t>
             </a:fld>
             <a:endParaRPr lang="en-GB"/>
           </a:p>
@@ -5875,7 +5875,7 @@
           <a:p>
             <a:fld id="{1A77EDC3-57CA-43CF-8E2C-C9B9AF002A04}" type="datetimeFigureOut">
               <a:rPr lang="en-GB" smtClean="0"/>
-              <a:t>07/11/2024</a:t>
+              <a:t>27/05/2025</a:t>
             </a:fld>
             <a:endParaRPr lang="en-GB"/>
           </a:p>
@@ -6075,7 +6075,7 @@
           <a:p>
             <a:fld id="{1A77EDC3-57CA-43CF-8E2C-C9B9AF002A04}" type="datetimeFigureOut">
               <a:rPr lang="en-GB" smtClean="0"/>
-              <a:t>07/11/2024</a:t>
+              <a:t>27/05/2025</a:t>
             </a:fld>
             <a:endParaRPr lang="en-GB"/>
           </a:p>
@@ -6285,7 +6285,7 @@
           <a:p>
             <a:fld id="{1A77EDC3-57CA-43CF-8E2C-C9B9AF002A04}" type="datetimeFigureOut">
               <a:rPr lang="en-GB" smtClean="0"/>
-              <a:t>07/11/2024</a:t>
+              <a:t>27/05/2025</a:t>
             </a:fld>
             <a:endParaRPr lang="en-GB"/>
           </a:p>
@@ -6485,7 +6485,7 @@
           <a:p>
             <a:fld id="{1A77EDC3-57CA-43CF-8E2C-C9B9AF002A04}" type="datetimeFigureOut">
               <a:rPr lang="en-GB" smtClean="0"/>
-              <a:t>07/11/2024</a:t>
+              <a:t>27/05/2025</a:t>
             </a:fld>
             <a:endParaRPr lang="en-GB"/>
           </a:p>
@@ -6761,7 +6761,7 @@
           <a:p>
             <a:fld id="{1A77EDC3-57CA-43CF-8E2C-C9B9AF002A04}" type="datetimeFigureOut">
               <a:rPr lang="en-GB" smtClean="0"/>
-              <a:t>07/11/2024</a:t>
+              <a:t>27/05/2025</a:t>
             </a:fld>
             <a:endParaRPr lang="en-GB"/>
           </a:p>
@@ -7029,7 +7029,7 @@
           <a:p>
             <a:fld id="{1A77EDC3-57CA-43CF-8E2C-C9B9AF002A04}" type="datetimeFigureOut">
               <a:rPr lang="en-GB" smtClean="0"/>
-              <a:t>07/11/2024</a:t>
+              <a:t>27/05/2025</a:t>
             </a:fld>
             <a:endParaRPr lang="en-GB"/>
           </a:p>
@@ -7444,7 +7444,7 @@
           <a:p>
             <a:fld id="{1A77EDC3-57CA-43CF-8E2C-C9B9AF002A04}" type="datetimeFigureOut">
               <a:rPr lang="en-GB" smtClean="0"/>
-              <a:t>07/11/2024</a:t>
+              <a:t>27/05/2025</a:t>
             </a:fld>
             <a:endParaRPr lang="en-GB"/>
           </a:p>
@@ -7586,7 +7586,7 @@
           <a:p>
             <a:fld id="{1A77EDC3-57CA-43CF-8E2C-C9B9AF002A04}" type="datetimeFigureOut">
               <a:rPr lang="en-GB" smtClean="0"/>
-              <a:t>07/11/2024</a:t>
+              <a:t>27/05/2025</a:t>
             </a:fld>
             <a:endParaRPr lang="en-GB"/>
           </a:p>
@@ -7699,7 +7699,7 @@
           <a:p>
             <a:fld id="{1A77EDC3-57CA-43CF-8E2C-C9B9AF002A04}" type="datetimeFigureOut">
               <a:rPr lang="en-GB" smtClean="0"/>
-              <a:t>07/11/2024</a:t>
+              <a:t>27/05/2025</a:t>
             </a:fld>
             <a:endParaRPr lang="en-GB"/>
           </a:p>
@@ -8012,7 +8012,7 @@
           <a:p>
             <a:fld id="{1A77EDC3-57CA-43CF-8E2C-C9B9AF002A04}" type="datetimeFigureOut">
               <a:rPr lang="en-GB" smtClean="0"/>
-              <a:t>07/11/2024</a:t>
+              <a:t>27/05/2025</a:t>
             </a:fld>
             <a:endParaRPr lang="en-GB"/>
           </a:p>
@@ -8301,7 +8301,7 @@
           <a:p>
             <a:fld id="{1A77EDC3-57CA-43CF-8E2C-C9B9AF002A04}" type="datetimeFigureOut">
               <a:rPr lang="en-GB" smtClean="0"/>
-              <a:t>07/11/2024</a:t>
+              <a:t>27/05/2025</a:t>
             </a:fld>
             <a:endParaRPr lang="en-GB"/>
           </a:p>
@@ -8544,7 +8544,7 @@
           <a:p>
             <a:fld id="{1A77EDC3-57CA-43CF-8E2C-C9B9AF002A04}" type="datetimeFigureOut">
               <a:rPr lang="en-GB" smtClean="0"/>
-              <a:t>07/11/2024</a:t>
+              <a:t>27/05/2025</a:t>
             </a:fld>
             <a:endParaRPr lang="en-GB"/>
           </a:p>
@@ -12400,7 +12400,7 @@
         </p:blipFill>
         <p:spPr>
           <a:xfrm>
-            <a:off x="2379704" y="3819158"/>
+            <a:off x="2367672" y="3807126"/>
             <a:ext cx="7432591" cy="2526246"/>
           </a:xfrm>
           <a:prstGeom prst="rect">
@@ -14028,7 +14028,7 @@
         </p:blipFill>
         <p:spPr>
           <a:xfrm>
-            <a:off x="2411405" y="2160256"/>
+            <a:off x="2411405" y="2172288"/>
             <a:ext cx="7369190" cy="3974659"/>
           </a:xfrm>
           <a:prstGeom prst="rect">
